--- a/notebooks/_outputs/pptx_translation/contrat_assurance_EN_js.pptx
+++ b/notebooks/_outputs/pptx_translation/contrat_assurance_EN_js.pptx
@@ -3800,7 +3800,7 @@
                     <a:lstStyle/>
                     <a:p>
                       <a:r>
-                        <a:t>Garantie</a:t>
+                        <a:t>Coverage</a:t>
                       </a:r>
                     </a:p>
                   </a:txBody>
@@ -3812,7 +3812,7 @@
                     <a:lstStyle/>
                     <a:p>
                       <a:r>
-                        <a:t>Plafond</a:t>
+                        <a:t>Limit</a:t>
                       </a:r>
                     </a:p>
                   </a:txBody>
@@ -3824,7 +3824,7 @@
                     <a:lstStyle/>
                     <a:p>
                       <a:r>
-                        <a:t>Franchise</a:t>
+                        <a:t>Deductible</a:t>
                       </a:r>
                     </a:p>
                   </a:txBody>
@@ -3850,7 +3850,7 @@
                     <a:lstStyle/>
                     <a:p>
                       <a:r>
-                        <a:t>50 000 EUR</a:t>
+                        <a:t>50,000 EUR</a:t>
                       </a:r>
                     </a:p>
                   </a:txBody>
@@ -3888,7 +3888,7 @@
                     <a:lstStyle/>
                     <a:p>
                       <a:r>
-                        <a:t>100 000 EUR</a:t>
+                        <a:t>100,000 EUR</a:t>
                       </a:r>
                     </a:p>
                   </a:txBody>
@@ -3900,7 +3900,7 @@
                     <a:lstStyle/>
                     <a:p>
                       <a:r>
-                        <a:t>1 000 EUR</a:t>
+                        <a:t>1,000 EUR</a:t>
                       </a:r>
                     </a:p>
                   </a:txBody>
@@ -3914,7 +3914,7 @@
                     <a:lstStyle/>
                     <a:p>
                       <a:r>
-                        <a:t>RC — Responsabilité Civile</a:t>
+                        <a:t>RC — Civil Liability</a:t>
                       </a:r>
                     </a:p>
                   </a:txBody>
@@ -3926,7 +3926,7 @@
                     <a:lstStyle/>
                     <a:p>
                       <a:r>
-                        <a:t>200 000 EUR</a:t>
+                        <a:t>200,000 EUR</a:t>
                       </a:r>
                     </a:p>
                   </a:txBody>
